--- a/examples/luxe.pptx
+++ b/examples/luxe.pptx
@@ -14,6 +14,7 @@
     <p:sldId id="262" r:id="rId13"/>
     <p:sldId id="263" r:id="rId14"/>
     <p:sldId id="264" r:id="rId15"/>
+    <p:sldId id="265" r:id="rId16"/>
   </p:sldIdLst>
   <p:sldSz cx="12192000" cy="6858000" type="screen4x3"/>
   <p:notesSz cx="6858000" cy="9144000"/>
@@ -3577,7 +3578,7 @@
         <p:spPr>
           <a:xfrm>
             <a:off x="8121550" y="4810125"/>
-            <a:ext cx="495300" cy="276225"/>
+            <a:ext cx="495300" cy="266700"/>
           </a:xfrm>
           <a:prstGeom prst="roundRect">
             <a:avLst>
@@ -3623,7 +3624,7 @@
         <p:spPr>
           <a:xfrm>
             <a:off x="8693050" y="4810125"/>
-            <a:ext cx="619125" cy="276225"/>
+            <a:ext cx="619125" cy="266700"/>
           </a:xfrm>
           <a:prstGeom prst="roundRect">
             <a:avLst>
@@ -3669,7 +3670,7 @@
         <p:spPr>
           <a:xfrm>
             <a:off x="9388375" y="4810125"/>
-            <a:ext cx="742950" cy="276225"/>
+            <a:ext cx="742950" cy="266700"/>
           </a:xfrm>
           <a:prstGeom prst="roundRect">
             <a:avLst>
@@ -3714,8 +3715,8 @@
         </p:nvSpPr>
         <p:spPr>
           <a:xfrm>
-            <a:off x="8121550" y="5162550"/>
-            <a:ext cx="742950" cy="276225"/>
+            <a:off x="8121550" y="5153025"/>
+            <a:ext cx="742950" cy="266700"/>
           </a:xfrm>
           <a:prstGeom prst="roundRect">
             <a:avLst>
@@ -3760,8 +3761,8 @@
         </p:nvSpPr>
         <p:spPr>
           <a:xfrm>
-            <a:off x="8940700" y="5162550"/>
-            <a:ext cx="866775" cy="276225"/>
+            <a:off x="8940700" y="5153025"/>
+            <a:ext cx="619125" cy="266700"/>
           </a:xfrm>
           <a:prstGeom prst="roundRect">
             <a:avLst>
@@ -3806,8 +3807,8 @@
         </p:nvSpPr>
         <p:spPr>
           <a:xfrm>
-            <a:off x="9883675" y="5162550"/>
-            <a:ext cx="619125" cy="276225"/>
+            <a:off x="9636025" y="5153025"/>
+            <a:ext cx="866775" cy="266700"/>
           </a:xfrm>
           <a:prstGeom prst="roundRect">
             <a:avLst>
@@ -3852,8 +3853,8 @@
         </p:nvSpPr>
         <p:spPr>
           <a:xfrm>
-            <a:off x="8121550" y="5514975"/>
-            <a:ext cx="742950" cy="276225"/>
+            <a:off x="8121550" y="5495925"/>
+            <a:ext cx="619125" cy="266700"/>
           </a:xfrm>
           <a:prstGeom prst="roundRect">
             <a:avLst>
@@ -3898,8 +3899,8 @@
         </p:nvSpPr>
         <p:spPr>
           <a:xfrm>
-            <a:off x="8940700" y="5514975"/>
-            <a:ext cx="495300" cy="276225"/>
+            <a:off x="8816875" y="5495925"/>
+            <a:ext cx="742950" cy="266700"/>
           </a:xfrm>
           <a:prstGeom prst="roundRect">
             <a:avLst>
@@ -3936,9 +3937,55 @@
           <a:p/>
         </p:txBody>
       </p:sp>
+      <p:sp>
+        <p:nvSpPr>
+          <p:cNvPr id="21" name="Rounded Rectangle 20"/>
+          <p:cNvSpPr/>
+          <p:nvPr/>
+        </p:nvSpPr>
+        <p:spPr>
+          <a:xfrm>
+            <a:off x="9636025" y="5495925"/>
+            <a:ext cx="495300" cy="266700"/>
+          </a:xfrm>
+          <a:prstGeom prst="roundRect">
+            <a:avLst>
+              <a:gd name="adj" fmla="val 50000"/>
+            </a:avLst>
+          </a:prstGeom>
+          <a:noFill/>
+          <a:ln w="9525">
+            <a:solidFill>
+              <a:srgbClr val="1C1C1C">
+                <a:alpha val="35000"/>
+              </a:srgbClr>
+            </a:solidFill>
+          </a:ln>
+          <a:effectLst/>
+        </p:spPr>
+        <p:style>
+          <a:lnRef idx="1">
+            <a:schemeClr val="accent1"/>
+          </a:lnRef>
+          <a:fillRef idx="3">
+            <a:schemeClr val="accent1"/>
+          </a:fillRef>
+          <a:effectRef idx="2">
+            <a:schemeClr val="accent1"/>
+          </a:effectRef>
+          <a:fontRef idx="minor">
+            <a:schemeClr val="lt1"/>
+          </a:fontRef>
+        </p:style>
+        <p:txBody>
+          <a:bodyPr rtlCol="0" anchor="ctr"/>
+          <a:lstStyle/>
+          <a:p/>
+        </p:txBody>
+      </p:sp>
       <p:pic>
         <p:nvPicPr>
-          <p:cNvPr id="21" name="Picture 20" descr="icon-gem-cd1cb6e719.png"/>
+          <p:cNvPr id="22" name="Picture 21" descr="icon-gem-cd1cb6e719.png"/>
           <p:cNvPicPr>
             <a:picLocks noChangeAspect="1"/>
           </p:cNvPicPr>
@@ -3962,7 +4009,7 @@
       </p:pic>
       <p:pic>
         <p:nvPicPr>
-          <p:cNvPr id="22" name="Picture 21" descr="icon-sparkles-6767e3d168.png"/>
+          <p:cNvPr id="23" name="Picture 22" descr="icon-sparkles-6767e3d168.png"/>
           <p:cNvPicPr>
             <a:picLocks noChangeAspect="1"/>
           </p:cNvPicPr>
@@ -3986,7 +4033,7 @@
       </p:pic>
       <p:pic>
         <p:nvPicPr>
-          <p:cNvPr id="23" name="Picture 22" descr="icon-heart-8c13c3df3d.png"/>
+          <p:cNvPr id="24" name="Picture 23" descr="icon-heart-8c13c3df3d.png"/>
           <p:cNvPicPr>
             <a:picLocks noChangeAspect="1"/>
           </p:cNvPicPr>
@@ -4010,7 +4057,7 @@
       </p:pic>
       <p:pic>
         <p:nvPicPr>
-          <p:cNvPr id="24" name="Picture 23" descr="icon-compass-2718090000.png"/>
+          <p:cNvPr id="25" name="Picture 24" descr="icon-compass-2718090000.png"/>
           <p:cNvPicPr>
             <a:picLocks noChangeAspect="1"/>
           </p:cNvPicPr>
@@ -4034,14 +4081,14 @@
       </p:pic>
       <p:sp>
         <p:nvSpPr>
-          <p:cNvPr id="25" name="TextBox 24"/>
+          <p:cNvPr id="26" name="TextBox 25"/>
           <p:cNvSpPr txBox="1"/>
           <p:nvPr/>
         </p:nvSpPr>
         <p:spPr>
           <a:xfrm>
             <a:off x="10603110" y="762000"/>
-            <a:ext cx="503039" cy="285750"/>
+            <a:ext cx="503039" cy="276225"/>
           </a:xfrm>
           <a:prstGeom prst="rect">
             <a:avLst/>
@@ -4056,7 +4103,7 @@
           <a:p>
             <a:pPr algn="l">
               <a:lnSpc>
-                <a:spcPts val="1950"/>
+                <a:spcPts val="1875"/>
               </a:lnSpc>
             </a:pPr>
             <a:r>
@@ -4074,7 +4121,7 @@
       </p:sp>
       <p:sp>
         <p:nvSpPr>
-          <p:cNvPr id="26" name="TextBox 25"/>
+          <p:cNvPr id="27" name="TextBox 26"/>
           <p:cNvSpPr txBox="1"/>
           <p:nvPr/>
         </p:nvSpPr>
@@ -4114,7 +4161,7 @@
       </p:sp>
       <p:sp>
         <p:nvSpPr>
-          <p:cNvPr id="27" name="TextBox 26"/>
+          <p:cNvPr id="28" name="TextBox 27"/>
           <p:cNvSpPr txBox="1"/>
           <p:nvPr/>
         </p:nvSpPr>
@@ -4154,7 +4201,7 @@
       </p:sp>
       <p:sp>
         <p:nvSpPr>
-          <p:cNvPr id="28" name="TextBox 27"/>
+          <p:cNvPr id="29" name="TextBox 28"/>
           <p:cNvSpPr txBox="1"/>
           <p:nvPr/>
         </p:nvSpPr>
@@ -4196,7 +4243,7 @@
       </p:sp>
       <p:sp>
         <p:nvSpPr>
-          <p:cNvPr id="29" name="TextBox 28"/>
+          <p:cNvPr id="30" name="TextBox 29"/>
           <p:cNvSpPr txBox="1"/>
           <p:nvPr/>
         </p:nvSpPr>
@@ -4238,7 +4285,7 @@
       </p:sp>
       <p:sp>
         <p:nvSpPr>
-          <p:cNvPr id="30" name="TextBox 29"/>
+          <p:cNvPr id="31" name="TextBox 30"/>
           <p:cNvSpPr txBox="1"/>
           <p:nvPr/>
         </p:nvSpPr>
@@ -4280,7 +4327,7 @@
       </p:sp>
       <p:sp>
         <p:nvSpPr>
-          <p:cNvPr id="31" name="TextBox 30"/>
+          <p:cNvPr id="32" name="TextBox 31"/>
           <p:cNvSpPr txBox="1"/>
           <p:nvPr/>
         </p:nvSpPr>
@@ -4322,7 +4369,7 @@
       </p:sp>
       <p:sp>
         <p:nvSpPr>
-          <p:cNvPr id="32" name="TextBox 31"/>
+          <p:cNvPr id="33" name="TextBox 32"/>
           <p:cNvSpPr txBox="1"/>
           <p:nvPr/>
         </p:nvSpPr>
@@ -4364,7 +4411,7 @@
       </p:sp>
       <p:sp>
         <p:nvSpPr>
-          <p:cNvPr id="33" name="TextBox 32"/>
+          <p:cNvPr id="34" name="TextBox 33"/>
           <p:cNvSpPr txBox="1"/>
           <p:nvPr/>
         </p:nvSpPr>
@@ -4404,14 +4451,14 @@
       </p:sp>
       <p:sp>
         <p:nvSpPr>
-          <p:cNvPr id="34" name="TextBox 33"/>
+          <p:cNvPr id="35" name="TextBox 34"/>
           <p:cNvSpPr txBox="1"/>
           <p:nvPr/>
         </p:nvSpPr>
         <p:spPr>
           <a:xfrm>
             <a:off x="4756100" y="2343150"/>
-            <a:ext cx="2736800" cy="815280"/>
+            <a:ext cx="2736800" cy="426690"/>
           </a:xfrm>
           <a:prstGeom prst="rect">
             <a:avLst/>
@@ -4444,13 +4491,13 @@
       </p:sp>
       <p:sp>
         <p:nvSpPr>
-          <p:cNvPr id="35" name="TextBox 34"/>
+          <p:cNvPr id="36" name="TextBox 35"/>
           <p:cNvSpPr txBox="1"/>
           <p:nvPr/>
         </p:nvSpPr>
         <p:spPr>
           <a:xfrm>
-            <a:off x="4756100" y="3234630"/>
+            <a:off x="4756100" y="2846040"/>
             <a:ext cx="2736800" cy="525660"/>
           </a:xfrm>
           <a:prstGeom prst="rect">
@@ -4484,7 +4531,7 @@
       </p:sp>
       <p:sp>
         <p:nvSpPr>
-          <p:cNvPr id="36" name="TextBox 35"/>
+          <p:cNvPr id="37" name="TextBox 36"/>
           <p:cNvSpPr txBox="1"/>
           <p:nvPr/>
         </p:nvSpPr>
@@ -4524,7 +4571,7 @@
       </p:sp>
       <p:sp>
         <p:nvSpPr>
-          <p:cNvPr id="37" name="TextBox 36"/>
+          <p:cNvPr id="38" name="TextBox 37"/>
           <p:cNvSpPr txBox="1"/>
           <p:nvPr/>
         </p:nvSpPr>
@@ -4564,7 +4611,7 @@
       </p:sp>
       <p:sp>
         <p:nvSpPr>
-          <p:cNvPr id="38" name="TextBox 37"/>
+          <p:cNvPr id="39" name="TextBox 38"/>
           <p:cNvSpPr txBox="1"/>
           <p:nvPr/>
         </p:nvSpPr>
@@ -4604,7 +4651,7 @@
       </p:sp>
       <p:sp>
         <p:nvSpPr>
-          <p:cNvPr id="39" name="TextBox 38"/>
+          <p:cNvPr id="40" name="TextBox 39"/>
           <p:cNvSpPr txBox="1"/>
           <p:nvPr/>
         </p:nvSpPr>
@@ -4644,7 +4691,7 @@
       </p:sp>
       <p:sp>
         <p:nvSpPr>
-          <p:cNvPr id="40" name="TextBox 39"/>
+          <p:cNvPr id="41" name="TextBox 40"/>
           <p:cNvSpPr txBox="1"/>
           <p:nvPr/>
         </p:nvSpPr>
@@ -4684,7 +4731,7 @@
       </p:sp>
       <p:sp>
         <p:nvSpPr>
-          <p:cNvPr id="41" name="TextBox 40"/>
+          <p:cNvPr id="42" name="TextBox 41"/>
           <p:cNvSpPr txBox="1"/>
           <p:nvPr/>
         </p:nvSpPr>
@@ -4724,7 +4771,7 @@
       </p:sp>
       <p:sp>
         <p:nvSpPr>
-          <p:cNvPr id="42" name="TextBox 41"/>
+          <p:cNvPr id="43" name="TextBox 42"/>
           <p:cNvSpPr txBox="1"/>
           <p:nvPr/>
         </p:nvSpPr>
@@ -4764,7 +4811,7 @@
       </p:sp>
       <p:sp>
         <p:nvSpPr>
-          <p:cNvPr id="43" name="TextBox 42"/>
+          <p:cNvPr id="44" name="TextBox 43"/>
           <p:cNvSpPr txBox="1"/>
           <p:nvPr/>
         </p:nvSpPr>
@@ -4799,14 +4846,14 @@
                 <a:latin typeface="Noto Sans TC"/>
                 <a:ea typeface="Noto Sans TC"/>
               </a:rPr>
-              <a:t>留白極大（頁邊 120px）· 每頁 ≤35 字</a:t>
-            </a:r>
-          </a:p>
-        </p:txBody>
-      </p:sp>
-      <p:sp>
-        <p:nvSpPr>
-          <p:cNvPr id="44" name="TextBox 43"/>
+              <a:t>留白極大（頁邊 120px）· 字級不縮，裝不下就拆頁</a:t>
+            </a:r>
+          </a:p>
+        </p:txBody>
+      </p:sp>
+      <p:sp>
+        <p:nvSpPr>
+          <p:cNvPr id="45" name="TextBox 44"/>
           <p:cNvSpPr txBox="1"/>
           <p:nvPr/>
         </p:nvSpPr>
@@ -4846,14 +4893,14 @@
       </p:sp>
       <p:sp>
         <p:nvSpPr>
-          <p:cNvPr id="45" name="TextBox 44"/>
+          <p:cNvPr id="46" name="TextBox 45"/>
           <p:cNvSpPr txBox="1"/>
           <p:nvPr/>
         </p:nvSpPr>
         <p:spPr>
           <a:xfrm>
             <a:off x="8121550" y="4810125"/>
-            <a:ext cx="552450" cy="314325"/>
+            <a:ext cx="552450" cy="304800"/>
           </a:xfrm>
           <a:prstGeom prst="rect">
             <a:avLst/>
@@ -4868,7 +4915,7 @@
           <a:p>
             <a:pPr algn="l">
               <a:lnSpc>
-                <a:spcPts val="2175"/>
+                <a:spcPts val="2100"/>
               </a:lnSpc>
             </a:pPr>
             <a:r>
@@ -4886,14 +4933,14 @@
       </p:sp>
       <p:sp>
         <p:nvSpPr>
-          <p:cNvPr id="46" name="TextBox 45"/>
+          <p:cNvPr id="47" name="TextBox 46"/>
           <p:cNvSpPr txBox="1"/>
           <p:nvPr/>
         </p:nvSpPr>
         <p:spPr>
           <a:xfrm>
             <a:off x="8693050" y="4810125"/>
-            <a:ext cx="676275" cy="314325"/>
+            <a:ext cx="676275" cy="304800"/>
           </a:xfrm>
           <a:prstGeom prst="rect">
             <a:avLst/>
@@ -4908,7 +4955,7 @@
           <a:p>
             <a:pPr algn="l">
               <a:lnSpc>
-                <a:spcPts val="2175"/>
+                <a:spcPts val="2100"/>
               </a:lnSpc>
             </a:pPr>
             <a:r>
@@ -4926,14 +4973,14 @@
       </p:sp>
       <p:sp>
         <p:nvSpPr>
-          <p:cNvPr id="47" name="TextBox 46"/>
+          <p:cNvPr id="48" name="TextBox 47"/>
           <p:cNvSpPr txBox="1"/>
           <p:nvPr/>
         </p:nvSpPr>
         <p:spPr>
           <a:xfrm>
             <a:off x="9388375" y="4810125"/>
-            <a:ext cx="800100" cy="314325"/>
+            <a:ext cx="800100" cy="304800"/>
           </a:xfrm>
           <a:prstGeom prst="rect">
             <a:avLst/>
@@ -4948,7 +4995,7 @@
           <a:p>
             <a:pPr algn="l">
               <a:lnSpc>
-                <a:spcPts val="2175"/>
+                <a:spcPts val="2100"/>
               </a:lnSpc>
             </a:pPr>
             <a:r>
@@ -4966,14 +5013,14 @@
       </p:sp>
       <p:sp>
         <p:nvSpPr>
-          <p:cNvPr id="48" name="TextBox 47"/>
+          <p:cNvPr id="49" name="TextBox 48"/>
           <p:cNvSpPr txBox="1"/>
           <p:nvPr/>
         </p:nvSpPr>
         <p:spPr>
           <a:xfrm>
-            <a:off x="8121550" y="5162550"/>
-            <a:ext cx="800100" cy="314325"/>
+            <a:off x="8121550" y="5153025"/>
+            <a:ext cx="800100" cy="304800"/>
           </a:xfrm>
           <a:prstGeom prst="rect">
             <a:avLst/>
@@ -4988,7 +5035,7 @@
           <a:p>
             <a:pPr algn="l">
               <a:lnSpc>
-                <a:spcPts val="2175"/>
+                <a:spcPts val="2100"/>
               </a:lnSpc>
             </a:pPr>
             <a:r>
@@ -5006,14 +5053,14 @@
       </p:sp>
       <p:sp>
         <p:nvSpPr>
-          <p:cNvPr id="49" name="TextBox 48"/>
+          <p:cNvPr id="50" name="TextBox 49"/>
           <p:cNvSpPr txBox="1"/>
           <p:nvPr/>
         </p:nvSpPr>
         <p:spPr>
           <a:xfrm>
-            <a:off x="8940700" y="5162550"/>
-            <a:ext cx="923925" cy="314325"/>
+            <a:off x="8940700" y="5153025"/>
+            <a:ext cx="676275" cy="304800"/>
           </a:xfrm>
           <a:prstGeom prst="rect">
             <a:avLst/>
@@ -5028,7 +5075,7 @@
           <a:p>
             <a:pPr algn="l">
               <a:lnSpc>
-                <a:spcPts val="2175"/>
+                <a:spcPts val="2100"/>
               </a:lnSpc>
             </a:pPr>
             <a:r>
@@ -5039,21 +5086,21 @@
                 <a:latin typeface="Noto Sans TC"/>
                 <a:ea typeface="Noto Sans TC"/>
               </a:rPr>
-              <a:t>一頁一數字</a:t>
-            </a:r>
-          </a:p>
-        </p:txBody>
-      </p:sp>
-      <p:sp>
-        <p:nvSpPr>
-          <p:cNvPr id="50" name="TextBox 49"/>
+              <a:t>長文頁</a:t>
+            </a:r>
+          </a:p>
+        </p:txBody>
+      </p:sp>
+      <p:sp>
+        <p:nvSpPr>
+          <p:cNvPr id="51" name="TextBox 50"/>
           <p:cNvSpPr txBox="1"/>
           <p:nvPr/>
         </p:nvSpPr>
         <p:spPr>
           <a:xfrm>
-            <a:off x="9883675" y="5162550"/>
-            <a:ext cx="676275" cy="314325"/>
+            <a:off x="9636025" y="5153025"/>
+            <a:ext cx="923925" cy="304800"/>
           </a:xfrm>
           <a:prstGeom prst="rect">
             <a:avLst/>
@@ -5068,7 +5115,7 @@
           <a:p>
             <a:pPr algn="l">
               <a:lnSpc>
-                <a:spcPts val="2175"/>
+                <a:spcPts val="2100"/>
               </a:lnSpc>
             </a:pPr>
             <a:r>
@@ -5079,21 +5126,21 @@
                 <a:latin typeface="Noto Sans TC"/>
                 <a:ea typeface="Noto Sans TC"/>
               </a:rPr>
-              <a:t>章節頁</a:t>
-            </a:r>
-          </a:p>
-        </p:txBody>
-      </p:sp>
-      <p:sp>
-        <p:nvSpPr>
-          <p:cNvPr id="51" name="TextBox 50"/>
+              <a:t>一頁一數字</a:t>
+            </a:r>
+          </a:p>
+        </p:txBody>
+      </p:sp>
+      <p:sp>
+        <p:nvSpPr>
+          <p:cNvPr id="52" name="TextBox 51"/>
           <p:cNvSpPr txBox="1"/>
           <p:nvPr/>
         </p:nvSpPr>
         <p:spPr>
           <a:xfrm>
-            <a:off x="8121550" y="5514975"/>
-            <a:ext cx="800100" cy="314325"/>
+            <a:off x="8121550" y="5495925"/>
+            <a:ext cx="676275" cy="304800"/>
           </a:xfrm>
           <a:prstGeom prst="rect">
             <a:avLst/>
@@ -5108,7 +5155,7 @@
           <a:p>
             <a:pPr algn="l">
               <a:lnSpc>
-                <a:spcPts val="2175"/>
+                <a:spcPts val="2100"/>
               </a:lnSpc>
             </a:pPr>
             <a:r>
@@ -5119,21 +5166,21 @@
                 <a:latin typeface="Noto Sans TC"/>
                 <a:ea typeface="Noto Sans TC"/>
               </a:rPr>
-              <a:t>步驟流程</a:t>
-            </a:r>
-          </a:p>
-        </p:txBody>
-      </p:sp>
-      <p:sp>
-        <p:nvSpPr>
-          <p:cNvPr id="52" name="TextBox 51"/>
+              <a:t>章節頁</a:t>
+            </a:r>
+          </a:p>
+        </p:txBody>
+      </p:sp>
+      <p:sp>
+        <p:nvSpPr>
+          <p:cNvPr id="53" name="TextBox 52"/>
           <p:cNvSpPr txBox="1"/>
           <p:nvPr/>
         </p:nvSpPr>
         <p:spPr>
           <a:xfrm>
-            <a:off x="8940700" y="5514975"/>
-            <a:ext cx="552450" cy="314325"/>
+            <a:off x="8816875" y="5495925"/>
+            <a:ext cx="800100" cy="304800"/>
           </a:xfrm>
           <a:prstGeom prst="rect">
             <a:avLst/>
@@ -5148,7 +5195,7 @@
           <a:p>
             <a:pPr algn="l">
               <a:lnSpc>
-                <a:spcPts val="2175"/>
+                <a:spcPts val="2100"/>
               </a:lnSpc>
             </a:pPr>
             <a:r>
@@ -5159,6 +5206,46 @@
                 <a:latin typeface="Noto Sans TC"/>
                 <a:ea typeface="Noto Sans TC"/>
               </a:rPr>
+              <a:t>步驟流程</a:t>
+            </a:r>
+          </a:p>
+        </p:txBody>
+      </p:sp>
+      <p:sp>
+        <p:nvSpPr>
+          <p:cNvPr id="54" name="TextBox 53"/>
+          <p:cNvSpPr txBox="1"/>
+          <p:nvPr/>
+        </p:nvSpPr>
+        <p:spPr>
+          <a:xfrm>
+            <a:off x="9636025" y="5495925"/>
+            <a:ext cx="552450" cy="304800"/>
+          </a:xfrm>
+          <a:prstGeom prst="rect">
+            <a:avLst/>
+          </a:prstGeom>
+          <a:noFill/>
+        </p:spPr>
+        <p:txBody>
+          <a:bodyPr wrap="square" lIns="0" rIns="0" tIns="0" bIns="0" anchor="t">
+            <a:spAutoFit/>
+          </a:bodyPr>
+          <a:lstStyle/>
+          <a:p>
+            <a:pPr algn="l">
+              <a:lnSpc>
+                <a:spcPts val="2100"/>
+              </a:lnSpc>
+            </a:pPr>
+            <a:r>
+              <a:rPr sz="975" b="0">
+                <a:solidFill>
+                  <a:srgbClr val="1C1C1C"/>
+                </a:solidFill>
+                <a:latin typeface="Noto Sans TC"/>
+                <a:ea typeface="Noto Sans TC"/>
+              </a:rPr>
               <a:t>封底</a:t>
             </a:r>
           </a:p>
@@ -5166,7 +5253,209 @@
       </p:sp>
       <p:sp>
         <p:nvSpPr>
-          <p:cNvPr id="53" name="TextBox 52"/>
+          <p:cNvPr id="55" name="TextBox 54"/>
+          <p:cNvSpPr txBox="1"/>
+          <p:nvPr/>
+        </p:nvSpPr>
+        <p:spPr>
+          <a:xfrm>
+            <a:off x="10916096" y="6362700"/>
+            <a:ext cx="190053" cy="228600"/>
+          </a:xfrm>
+          <a:prstGeom prst="rect">
+            <a:avLst/>
+          </a:prstGeom>
+          <a:noFill/>
+        </p:spPr>
+        <p:txBody>
+          <a:bodyPr wrap="square" lIns="0" rIns="0" tIns="0" bIns="0" anchor="t">
+            <a:spAutoFit/>
+          </a:bodyPr>
+          <a:lstStyle/>
+          <a:p>
+            <a:pPr algn="l">
+              <a:lnSpc>
+                <a:spcPts val="1500"/>
+              </a:lnSpc>
+            </a:pPr>
+            <a:r>
+              <a:rPr sz="1050" b="0">
+                <a:solidFill>
+                  <a:srgbClr val="1C1C1C"/>
+                </a:solidFill>
+                <a:latin typeface="Noto Sans TC"/>
+                <a:ea typeface="Noto Sans TC"/>
+              </a:rPr>
+              <a:t>01</a:t>
+            </a:r>
+          </a:p>
+        </p:txBody>
+      </p:sp>
+    </p:spTree>
+  </p:cSld>
+  <p:clrMapOvr>
+    <a:masterClrMapping/>
+  </p:clrMapOvr>
+</p:sld>
+</file>
+
+<file path=ppt/slides/slide10.xml><?xml version="1.0" encoding="utf-8"?>
+<p:sld xmlns:a="http://schemas.openxmlformats.org/drawingml/2006/main" xmlns:p="http://schemas.openxmlformats.org/presentationml/2006/main" xmlns:r="http://schemas.openxmlformats.org/officeDocument/2006/relationships">
+  <p:cSld>
+    <p:spTree>
+      <p:nvGrpSpPr>
+        <p:cNvPr id="1" name=""/>
+        <p:cNvGrpSpPr/>
+        <p:nvPr/>
+      </p:nvGrpSpPr>
+      <p:grpSpPr/>
+      <p:pic>
+        <p:nvPicPr>
+          <p:cNvPr id="2" name="Picture 1" descr="luxe-1-bake.jpg"/>
+          <p:cNvPicPr>
+            <a:picLocks noChangeAspect="1"/>
+          </p:cNvPicPr>
+          <p:nvPr/>
+        </p:nvPicPr>
+        <p:blipFill>
+          <a:blip r:embed="rId2"/>
+          <a:stretch>
+            <a:fillRect/>
+          </a:stretch>
+        </p:blipFill>
+        <p:spPr>
+          <a:xfrm>
+            <a:off x="0" y="0"/>
+            <a:ext cx="12192000" cy="6858000"/>
+          </a:xfrm>
+          <a:prstGeom prst="rect">
+            <a:avLst/>
+          </a:prstGeom>
+        </p:spPr>
+      </p:pic>
+      <p:sp>
+        <p:nvSpPr>
+          <p:cNvPr id="3" name="TextBox 2"/>
+          <p:cNvSpPr txBox="1"/>
+          <p:nvPr/>
+        </p:nvSpPr>
+        <p:spPr>
+          <a:xfrm>
+            <a:off x="10603110" y="762000"/>
+            <a:ext cx="503039" cy="285750"/>
+          </a:xfrm>
+          <a:prstGeom prst="rect">
+            <a:avLst/>
+          </a:prstGeom>
+          <a:noFill/>
+        </p:spPr>
+        <p:txBody>
+          <a:bodyPr wrap="square" lIns="0" rIns="0" tIns="0" bIns="0" anchor="t">
+            <a:spAutoFit/>
+          </a:bodyPr>
+          <a:lstStyle/>
+          <a:p>
+            <a:pPr algn="l">
+              <a:lnSpc>
+                <a:spcPts val="1950"/>
+              </a:lnSpc>
+            </a:pPr>
+            <a:r>
+              <a:rPr sz="1350" b="1" spc="405">
+                <a:solidFill>
+                  <a:srgbClr val="1C1C1C"/>
+                </a:solidFill>
+                <a:latin typeface="Noto Serif TC"/>
+                <a:ea typeface="Noto Serif TC"/>
+              </a:rPr>
+              <a:t>靜物</a:t>
+            </a:r>
+          </a:p>
+        </p:txBody>
+      </p:sp>
+      <p:sp>
+        <p:nvSpPr>
+          <p:cNvPr id="4" name="TextBox 3"/>
+          <p:cNvSpPr txBox="1"/>
+          <p:nvPr/>
+        </p:nvSpPr>
+        <p:spPr>
+          <a:xfrm>
+            <a:off x="1143000" y="2840384"/>
+            <a:ext cx="9963150" cy="533400"/>
+          </a:xfrm>
+          <a:prstGeom prst="rect">
+            <a:avLst/>
+          </a:prstGeom>
+          <a:noFill/>
+        </p:spPr>
+        <p:txBody>
+          <a:bodyPr wrap="square" lIns="0" rIns="0" tIns="0" bIns="0" anchor="t">
+            <a:spAutoFit/>
+          </a:bodyPr>
+          <a:lstStyle/>
+          <a:p>
+            <a:pPr algn="l">
+              <a:lnSpc>
+                <a:spcPts val="3900"/>
+              </a:lnSpc>
+            </a:pPr>
+            <a:r>
+              <a:rPr sz="3000" b="1">
+                <a:solidFill>
+                  <a:srgbClr val="1C1C1C"/>
+                </a:solidFill>
+                <a:latin typeface="Noto Serif TC"/>
+                <a:ea typeface="Noto Serif TC"/>
+              </a:rPr>
+              <a:t>留久一點。</a:t>
+            </a:r>
+          </a:p>
+        </p:txBody>
+      </p:sp>
+      <p:sp>
+        <p:nvSpPr>
+          <p:cNvPr id="5" name="TextBox 4"/>
+          <p:cNvSpPr txBox="1"/>
+          <p:nvPr/>
+        </p:nvSpPr>
+        <p:spPr>
+          <a:xfrm>
+            <a:off x="1143000" y="3640484"/>
+            <a:ext cx="9963150" cy="415230"/>
+          </a:xfrm>
+          <a:prstGeom prst="rect">
+            <a:avLst/>
+          </a:prstGeom>
+          <a:noFill/>
+        </p:spPr>
+        <p:txBody>
+          <a:bodyPr wrap="square" lIns="0" rIns="0" tIns="0" bIns="0" anchor="t">
+            <a:spAutoFit/>
+          </a:bodyPr>
+          <a:lstStyle/>
+          <a:p>
+            <a:pPr algn="l">
+              <a:lnSpc>
+                <a:spcPts val="2970"/>
+              </a:lnSpc>
+            </a:pPr>
+            <a:r>
+              <a:rPr sz="1650" b="0">
+                <a:solidFill>
+                  <a:srgbClr val="1C1C1C"/>
+                </a:solidFill>
+                <a:latin typeface="Noto Sans TC"/>
+                <a:ea typeface="Noto Sans TC"/>
+              </a:rPr>
+              <a:t>still@example.com（示意，換成你的）</a:t>
+            </a:r>
+          </a:p>
+        </p:txBody>
+      </p:sp>
+      <p:sp>
+        <p:nvSpPr>
+          <p:cNvPr id="6" name="TextBox 5"/>
           <p:cNvSpPr txBox="1"/>
           <p:nvPr/>
         </p:nvSpPr>
@@ -5199,7 +5488,7 @@
                 <a:latin typeface="Noto Sans TC"/>
                 <a:ea typeface="Noto Sans TC"/>
               </a:rPr>
-              <a:t>01</a:t>
+              <a:t>10</a:t>
             </a:r>
           </a:p>
         </p:txBody>
@@ -6809,8 +7098,8 @@
         </p:nvSpPr>
         <p:spPr>
           <a:xfrm>
-            <a:off x="1143000" y="1939379"/>
-            <a:ext cx="9963150" cy="1943100"/>
+            <a:off x="1143000" y="1143000"/>
+            <a:ext cx="9963150" cy="533400"/>
           </a:xfrm>
           <a:prstGeom prst="rect">
             <a:avLst/>
@@ -6825,18 +7114,18 @@
           <a:p>
             <a:pPr algn="l">
               <a:lnSpc>
-                <a:spcPts val="15000"/>
-              </a:lnSpc>
-            </a:pPr>
-            <a:r>
-              <a:rPr sz="15000" b="1">
-                <a:solidFill>
-                  <a:srgbClr val="7A6547"/>
+                <a:spcPts val="3900"/>
+              </a:lnSpc>
+            </a:pPr>
+            <a:r>
+              <a:rPr sz="3000" b="1">
+                <a:solidFill>
+                  <a:srgbClr val="1C1C1C"/>
                 </a:solidFill>
                 <a:latin typeface="Noto Serif TC"/>
                 <a:ea typeface="Noto Serif TC"/>
               </a:rPr>
-              <a:t>12 件</a:t>
+              <a:t>內文多的時候</a:t>
             </a:r>
           </a:p>
         </p:txBody>
@@ -6849,8 +7138,8 @@
         </p:nvSpPr>
         <p:spPr>
           <a:xfrm>
-            <a:off x="1143000" y="4072979"/>
-            <a:ext cx="6153150" cy="415230"/>
+            <a:off x="1143000" y="2025253"/>
+            <a:ext cx="9963150" cy="792360"/>
           </a:xfrm>
           <a:prstGeom prst="rect">
             <a:avLst/>
@@ -6876,7 +7165,7 @@
                 <a:latin typeface="Noto Sans TC"/>
                 <a:ea typeface="Noto Sans TC"/>
               </a:rPr>
-              <a:t>本季全部作品。</a:t>
+              <a:t>這一頁是假字，用來示範內文很多的時候版面長什麼樣。字級還是 22，行距照大腦的設定，段落一段接一段往下排，不因為字多就把字縮小，也不把留白吃掉。</a:t>
             </a:r>
           </a:p>
         </p:txBody>
@@ -6889,8 +7178,8 @@
         </p:nvSpPr>
         <p:spPr>
           <a:xfrm>
-            <a:off x="1143000" y="4678709"/>
-            <a:ext cx="6153150" cy="278010"/>
+            <a:off x="1143000" y="2950964"/>
+            <a:ext cx="9963150" cy="792360"/>
           </a:xfrm>
           <a:prstGeom prst="rect">
             <a:avLst/>
@@ -6905,20 +7194,18 @@
           <a:p>
             <a:pPr algn="l">
               <a:lnSpc>
-                <a:spcPts val="1889"/>
-              </a:lnSpc>
-            </a:pPr>
-            <a:r>
-              <a:rPr sz="1050" b="0">
-                <a:solidFill>
-                  <a:srgbClr val="1C1C1C">
-                    <a:alpha val="85000"/>
-                  </a:srgbClr>
+                <a:spcPts val="2970"/>
+              </a:lnSpc>
+            </a:pPr>
+            <a:r>
+              <a:rPr sz="1650" b="0">
+                <a:solidFill>
+                  <a:srgbClr val="1C1C1C"/>
                 </a:solidFill>
                 <a:latin typeface="Noto Sans TC"/>
                 <a:ea typeface="Noto Sans TC"/>
               </a:rPr>
-              <a:t>示意數字，換成你的。</a:t>
+              <a:t>假字假字，這裡通常會放一段背景說明：為什麼要做這件事、之前試過什麼、現在卡在哪裡。寫的時候一段只講一個重點，讀的人才跟得上，講的人也不會念到一半迷路。</a:t>
             </a:r>
           </a:p>
         </p:txBody>
@@ -6926,6 +7213,86 @@
       <p:sp>
         <p:nvSpPr>
           <p:cNvPr id="7" name="TextBox 6"/>
+          <p:cNvSpPr txBox="1"/>
+          <p:nvPr/>
+        </p:nvSpPr>
+        <p:spPr>
+          <a:xfrm>
+            <a:off x="1143000" y="3876675"/>
+            <a:ext cx="9963150" cy="792360"/>
+          </a:xfrm>
+          <a:prstGeom prst="rect">
+            <a:avLst/>
+          </a:prstGeom>
+          <a:noFill/>
+        </p:spPr>
+        <p:txBody>
+          <a:bodyPr wrap="square" lIns="0" rIns="0" tIns="0" bIns="0" anchor="t">
+            <a:spAutoFit/>
+          </a:bodyPr>
+          <a:lstStyle/>
+          <a:p>
+            <a:pPr algn="l">
+              <a:lnSpc>
+                <a:spcPts val="2970"/>
+              </a:lnSpc>
+            </a:pPr>
+            <a:r>
+              <a:rPr sz="1650" b="0">
+                <a:solidFill>
+                  <a:srgbClr val="1C1C1C"/>
+                </a:solidFill>
+                <a:latin typeface="Noto Sans TC"/>
+                <a:ea typeface="Noto Sans TC"/>
+              </a:rPr>
+              <a:t>內文到這個量大概就是一頁的上限。再多就拆成兩頁，或改用三欄重點、步驟流程把重點並列；不要縮字硬塞，也不要把行距壓扁，那樣看起來就不像同一份簡報了。</a:t>
+            </a:r>
+          </a:p>
+        </p:txBody>
+      </p:sp>
+      <p:sp>
+        <p:nvSpPr>
+          <p:cNvPr id="8" name="TextBox 7"/>
+          <p:cNvSpPr txBox="1"/>
+          <p:nvPr/>
+        </p:nvSpPr>
+        <p:spPr>
+          <a:xfrm>
+            <a:off x="1143000" y="4802385"/>
+            <a:ext cx="9963150" cy="792360"/>
+          </a:xfrm>
+          <a:prstGeom prst="rect">
+            <a:avLst/>
+          </a:prstGeom>
+          <a:noFill/>
+        </p:spPr>
+        <p:txBody>
+          <a:bodyPr wrap="square" lIns="0" rIns="0" tIns="0" bIns="0" anchor="t">
+            <a:spAutoFit/>
+          </a:bodyPr>
+          <a:lstStyle/>
+          <a:p>
+            <a:pPr algn="l">
+              <a:lnSpc>
+                <a:spcPts val="2970"/>
+              </a:lnSpc>
+            </a:pPr>
+            <a:r>
+              <a:rPr sz="1650" b="0">
+                <a:solidFill>
+                  <a:srgbClr val="1C1C1C"/>
+                </a:solidFill>
+                <a:latin typeface="Noto Sans TC"/>
+                <a:ea typeface="Noto Sans TC"/>
+              </a:rPr>
+              <a:t>最後一段留給補充：數字要有出處、名詞前後一致、日期用絕對值。這些寫在大腦的禁區裡，AI 排版時會照做，你交件前只要對一次就好。</a:t>
+            </a:r>
+          </a:p>
+        </p:txBody>
+      </p:sp>
+      <p:sp>
+        <p:nvSpPr>
+          <p:cNvPr id="9" name="TextBox 8"/>
           <p:cNvSpPr txBox="1"/>
           <p:nvPr/>
         </p:nvSpPr>
@@ -6983,7 +7350,7 @@
       <p:grpSpPr/>
       <p:pic>
         <p:nvPicPr>
-          <p:cNvPr id="2" name="Picture 1" descr="luxe-3-bake.jpg"/>
+          <p:cNvPr id="2" name="Picture 1" descr="luxe-1-bake.jpg"/>
           <p:cNvPicPr>
             <a:picLocks noChangeAspect="1"/>
           </p:cNvPicPr>
@@ -7035,7 +7402,7 @@
             <a:r>
               <a:rPr sz="1350" b="1" spc="405">
                 <a:solidFill>
-                  <a:srgbClr val="F3F1EC"/>
+                  <a:srgbClr val="1C1C1C"/>
                 </a:solidFill>
                 <a:latin typeface="Noto Serif TC"/>
                 <a:ea typeface="Noto Serif TC"/>
@@ -7053,8 +7420,8 @@
         </p:nvSpPr>
         <p:spPr>
           <a:xfrm>
-            <a:off x="1143000" y="2472630"/>
-            <a:ext cx="9963150" cy="1181100"/>
+            <a:off x="1143000" y="1939379"/>
+            <a:ext cx="9963150" cy="1943100"/>
           </a:xfrm>
           <a:prstGeom prst="rect">
             <a:avLst/>
@@ -7069,20 +7436,18 @@
           <a:p>
             <a:pPr algn="l">
               <a:lnSpc>
-                <a:spcPts val="9000"/>
-              </a:lnSpc>
-            </a:pPr>
-            <a:r>
-              <a:rPr sz="9000" b="1">
-                <a:solidFill>
-                  <a:srgbClr val="F3F1EC">
-                    <a:alpha val="35000"/>
-                  </a:srgbClr>
+                <a:spcPts val="15000"/>
+              </a:lnSpc>
+            </a:pPr>
+            <a:r>
+              <a:rPr sz="15000" b="1">
+                <a:solidFill>
+                  <a:srgbClr val="7A6547"/>
                 </a:solidFill>
                 <a:latin typeface="Noto Serif TC"/>
                 <a:ea typeface="Noto Serif TC"/>
               </a:rPr>
-              <a:t>02</a:t>
+              <a:t>12 件</a:t>
             </a:r>
           </a:p>
         </p:txBody>
@@ -7095,8 +7460,8 @@
         </p:nvSpPr>
         <p:spPr>
           <a:xfrm>
-            <a:off x="1143000" y="3691830"/>
-            <a:ext cx="9963150" cy="731490"/>
+            <a:off x="1143000" y="4072979"/>
+            <a:ext cx="6153150" cy="415230"/>
           </a:xfrm>
           <a:prstGeom prst="rect">
             <a:avLst/>
@@ -7111,18 +7476,18 @@
           <a:p>
             <a:pPr algn="l">
               <a:lnSpc>
-                <a:spcPts val="5459"/>
-              </a:lnSpc>
-            </a:pPr>
-            <a:r>
-              <a:rPr sz="4200" b="1">
-                <a:solidFill>
-                  <a:srgbClr val="F3F1EC"/>
-                </a:solidFill>
-                <a:latin typeface="Noto Serif TC"/>
-                <a:ea typeface="Noto Serif TC"/>
-              </a:rPr>
-              <a:t>購買</a:t>
+                <a:spcPts val="2970"/>
+              </a:lnSpc>
+            </a:pPr>
+            <a:r>
+              <a:rPr sz="1650" b="0">
+                <a:solidFill>
+                  <a:srgbClr val="1C1C1C"/>
+                </a:solidFill>
+                <a:latin typeface="Noto Sans TC"/>
+                <a:ea typeface="Noto Sans TC"/>
+              </a:rPr>
+              <a:t>本季全部作品。</a:t>
             </a:r>
           </a:p>
         </p:txBody>
@@ -7135,6 +7500,48 @@
         </p:nvSpPr>
         <p:spPr>
           <a:xfrm>
+            <a:off x="1143000" y="4678709"/>
+            <a:ext cx="6153150" cy="278010"/>
+          </a:xfrm>
+          <a:prstGeom prst="rect">
+            <a:avLst/>
+          </a:prstGeom>
+          <a:noFill/>
+        </p:spPr>
+        <p:txBody>
+          <a:bodyPr wrap="square" lIns="0" rIns="0" tIns="0" bIns="0" anchor="t">
+            <a:spAutoFit/>
+          </a:bodyPr>
+          <a:lstStyle/>
+          <a:p>
+            <a:pPr algn="l">
+              <a:lnSpc>
+                <a:spcPts val="1889"/>
+              </a:lnSpc>
+            </a:pPr>
+            <a:r>
+              <a:rPr sz="1050" b="0">
+                <a:solidFill>
+                  <a:srgbClr val="1C1C1C">
+                    <a:alpha val="85000"/>
+                  </a:srgbClr>
+                </a:solidFill>
+                <a:latin typeface="Noto Sans TC"/>
+                <a:ea typeface="Noto Sans TC"/>
+              </a:rPr>
+              <a:t>示意數字，換成你的。</a:t>
+            </a:r>
+          </a:p>
+        </p:txBody>
+      </p:sp>
+      <p:sp>
+        <p:nvSpPr>
+          <p:cNvPr id="7" name="TextBox 6"/>
+          <p:cNvSpPr txBox="1"/>
+          <p:nvPr/>
+        </p:nvSpPr>
+        <p:spPr>
+          <a:xfrm>
             <a:off x="10906273" y="6362700"/>
             <a:ext cx="199876" cy="228600"/>
           </a:xfrm>
@@ -7157,7 +7564,7 @@
             <a:r>
               <a:rPr sz="1050" b="0">
                 <a:solidFill>
-                  <a:srgbClr val="F3F1EC"/>
+                  <a:srgbClr val="1C1C1C"/>
                 </a:solidFill>
                 <a:latin typeface="Noto Sans TC"/>
                 <a:ea typeface="Noto Sans TC"/>
@@ -7187,7 +7594,7 @@
       <p:grpSpPr/>
       <p:pic>
         <p:nvPicPr>
-          <p:cNvPr id="2" name="Picture 1" descr="luxe-1-bake.jpg"/>
+          <p:cNvPr id="2" name="Picture 1" descr="luxe-3-bake.jpg"/>
           <p:cNvPicPr>
             <a:picLocks noChangeAspect="1"/>
           </p:cNvPicPr>
@@ -7211,128 +7618,124 @@
       </p:pic>
       <p:sp>
         <p:nvSpPr>
-          <p:cNvPr id="3" name="Rectangle 2"/>
-          <p:cNvSpPr/>
-          <p:nvPr/>
-        </p:nvSpPr>
-        <p:spPr>
-          <a:xfrm>
-            <a:off x="1143000" y="2911822"/>
-            <a:ext cx="3048000" cy="1758255"/>
-          </a:xfrm>
-          <a:prstGeom prst="rect">
-            <a:avLst/>
-          </a:prstGeom>
-          <a:noFill/>
-          <a:ln w="9525">
-            <a:solidFill>
-              <a:srgbClr val="7A6547"/>
-            </a:solidFill>
-          </a:ln>
-          <a:effectLst/>
-        </p:spPr>
-        <p:style>
-          <a:lnRef idx="1">
-            <a:schemeClr val="accent1"/>
-          </a:lnRef>
-          <a:fillRef idx="3">
-            <a:schemeClr val="accent1"/>
-          </a:fillRef>
-          <a:effectRef idx="2">
-            <a:schemeClr val="accent1"/>
-          </a:effectRef>
-          <a:fontRef idx="minor">
-            <a:schemeClr val="lt1"/>
-          </a:fontRef>
-        </p:style>
-        <p:txBody>
-          <a:bodyPr rtlCol="0" anchor="ctr"/>
-          <a:lstStyle/>
-          <a:p/>
-        </p:txBody>
-      </p:sp>
-      <p:sp>
-        <p:nvSpPr>
-          <p:cNvPr id="4" name="Rectangle 3"/>
-          <p:cNvSpPr/>
-          <p:nvPr/>
-        </p:nvSpPr>
-        <p:spPr>
-          <a:xfrm>
-            <a:off x="4572000" y="2911822"/>
-            <a:ext cx="3048000" cy="1758255"/>
-          </a:xfrm>
-          <a:prstGeom prst="rect">
-            <a:avLst/>
-          </a:prstGeom>
-          <a:noFill/>
-          <a:ln w="9525">
-            <a:solidFill>
-              <a:srgbClr val="7A6547"/>
-            </a:solidFill>
-          </a:ln>
-          <a:effectLst/>
-        </p:spPr>
-        <p:style>
-          <a:lnRef idx="1">
-            <a:schemeClr val="accent1"/>
-          </a:lnRef>
-          <a:fillRef idx="3">
-            <a:schemeClr val="accent1"/>
-          </a:fillRef>
-          <a:effectRef idx="2">
-            <a:schemeClr val="accent1"/>
-          </a:effectRef>
-          <a:fontRef idx="minor">
-            <a:schemeClr val="lt1"/>
-          </a:fontRef>
-        </p:style>
-        <p:txBody>
-          <a:bodyPr rtlCol="0" anchor="ctr"/>
-          <a:lstStyle/>
-          <a:p/>
-        </p:txBody>
-      </p:sp>
-      <p:sp>
-        <p:nvSpPr>
-          <p:cNvPr id="5" name="Rectangle 4"/>
-          <p:cNvSpPr/>
-          <p:nvPr/>
-        </p:nvSpPr>
-        <p:spPr>
-          <a:xfrm>
-            <a:off x="8001000" y="2911822"/>
-            <a:ext cx="3048000" cy="1758255"/>
-          </a:xfrm>
-          <a:prstGeom prst="rect">
-            <a:avLst/>
-          </a:prstGeom>
-          <a:noFill/>
-          <a:ln w="9525">
-            <a:solidFill>
-              <a:srgbClr val="7A6547"/>
-            </a:solidFill>
-          </a:ln>
-          <a:effectLst/>
-        </p:spPr>
-        <p:style>
-          <a:lnRef idx="1">
-            <a:schemeClr val="accent1"/>
-          </a:lnRef>
-          <a:fillRef idx="3">
-            <a:schemeClr val="accent1"/>
-          </a:fillRef>
-          <a:effectRef idx="2">
-            <a:schemeClr val="accent1"/>
-          </a:effectRef>
-          <a:fontRef idx="minor">
-            <a:schemeClr val="lt1"/>
-          </a:fontRef>
-        </p:style>
-        <p:txBody>
-          <a:bodyPr rtlCol="0" anchor="ctr"/>
-          <a:lstStyle/>
-          <a:p/>
+          <p:cNvPr id="3" name="TextBox 2"/>
+          <p:cNvSpPr txBox="1"/>
+          <p:nvPr/>
+        </p:nvSpPr>
+        <p:spPr>
+          <a:xfrm>
+            <a:off x="10603110" y="762000"/>
+            <a:ext cx="503039" cy="285750"/>
+          </a:xfrm>
+          <a:prstGeom prst="rect">
+            <a:avLst/>
+          </a:prstGeom>
+          <a:noFill/>
+        </p:spPr>
+        <p:txBody>
+          <a:bodyPr wrap="square" lIns="0" rIns="0" tIns="0" bIns="0" anchor="t">
+            <a:spAutoFit/>
+          </a:bodyPr>
+          <a:lstStyle/>
+          <a:p>
+            <a:pPr algn="l">
+              <a:lnSpc>
+                <a:spcPts val="1950"/>
+              </a:lnSpc>
+            </a:pPr>
+            <a:r>
+              <a:rPr sz="1350" b="1" spc="405">
+                <a:solidFill>
+                  <a:srgbClr val="F3F1EC"/>
+                </a:solidFill>
+                <a:latin typeface="Noto Serif TC"/>
+                <a:ea typeface="Noto Serif TC"/>
+              </a:rPr>
+              <a:t>靜物</a:t>
+            </a:r>
+          </a:p>
+        </p:txBody>
+      </p:sp>
+      <p:sp>
+        <p:nvSpPr>
+          <p:cNvPr id="4" name="TextBox 3"/>
+          <p:cNvSpPr txBox="1"/>
+          <p:nvPr/>
+        </p:nvSpPr>
+        <p:spPr>
+          <a:xfrm>
+            <a:off x="1143000" y="2472630"/>
+            <a:ext cx="9963150" cy="1181100"/>
+          </a:xfrm>
+          <a:prstGeom prst="rect">
+            <a:avLst/>
+          </a:prstGeom>
+          <a:noFill/>
+        </p:spPr>
+        <p:txBody>
+          <a:bodyPr wrap="square" lIns="0" rIns="0" tIns="0" bIns="0" anchor="t">
+            <a:spAutoFit/>
+          </a:bodyPr>
+          <a:lstStyle/>
+          <a:p>
+            <a:pPr algn="l">
+              <a:lnSpc>
+                <a:spcPts val="9000"/>
+              </a:lnSpc>
+            </a:pPr>
+            <a:r>
+              <a:rPr sz="9000" b="1">
+                <a:solidFill>
+                  <a:srgbClr val="F3F1EC">
+                    <a:alpha val="35000"/>
+                  </a:srgbClr>
+                </a:solidFill>
+                <a:latin typeface="Noto Serif TC"/>
+                <a:ea typeface="Noto Serif TC"/>
+              </a:rPr>
+              <a:t>02</a:t>
+            </a:r>
+          </a:p>
+        </p:txBody>
+      </p:sp>
+      <p:sp>
+        <p:nvSpPr>
+          <p:cNvPr id="5" name="TextBox 4"/>
+          <p:cNvSpPr txBox="1"/>
+          <p:nvPr/>
+        </p:nvSpPr>
+        <p:spPr>
+          <a:xfrm>
+            <a:off x="1143000" y="3691830"/>
+            <a:ext cx="9963150" cy="731490"/>
+          </a:xfrm>
+          <a:prstGeom prst="rect">
+            <a:avLst/>
+          </a:prstGeom>
+          <a:noFill/>
+        </p:spPr>
+        <p:txBody>
+          <a:bodyPr wrap="square" lIns="0" rIns="0" tIns="0" bIns="0" anchor="t">
+            <a:spAutoFit/>
+          </a:bodyPr>
+          <a:lstStyle/>
+          <a:p>
+            <a:pPr algn="l">
+              <a:lnSpc>
+                <a:spcPts val="5459"/>
+              </a:lnSpc>
+            </a:pPr>
+            <a:r>
+              <a:rPr sz="4200" b="1">
+                <a:solidFill>
+                  <a:srgbClr val="F3F1EC"/>
+                </a:solidFill>
+                <a:latin typeface="Noto Serif TC"/>
+                <a:ea typeface="Noto Serif TC"/>
+              </a:rPr>
+              <a:t>購買</a:t>
+            </a:r>
+          </a:p>
         </p:txBody>
       </p:sp>
       <p:sp>
@@ -7343,8 +7746,8 @@
         </p:nvSpPr>
         <p:spPr>
           <a:xfrm>
-            <a:off x="10603110" y="762000"/>
-            <a:ext cx="503039" cy="285750"/>
+            <a:off x="10906273" y="6362700"/>
+            <a:ext cx="199876" cy="228600"/>
           </a:xfrm>
           <a:prstGeom prst="rect">
             <a:avLst/>
@@ -7359,453 +7762,13 @@
           <a:p>
             <a:pPr algn="l">
               <a:lnSpc>
-                <a:spcPts val="1950"/>
-              </a:lnSpc>
-            </a:pPr>
-            <a:r>
-              <a:rPr sz="1350" b="1" spc="405">
-                <a:solidFill>
-                  <a:srgbClr val="1C1C1C"/>
-                </a:solidFill>
-                <a:latin typeface="Noto Serif TC"/>
-                <a:ea typeface="Noto Serif TC"/>
-              </a:rPr>
-              <a:t>靜物</a:t>
-            </a:r>
-          </a:p>
-        </p:txBody>
-      </p:sp>
-      <p:sp>
-        <p:nvSpPr>
-          <p:cNvPr id="7" name="TextBox 6"/>
-          <p:cNvSpPr txBox="1"/>
-          <p:nvPr/>
-        </p:nvSpPr>
-        <p:spPr>
-          <a:xfrm>
-            <a:off x="1143000" y="1143000"/>
-            <a:ext cx="9963150" cy="533400"/>
-          </a:xfrm>
-          <a:prstGeom prst="rect">
-            <a:avLst/>
-          </a:prstGeom>
-          <a:noFill/>
-        </p:spPr>
-        <p:txBody>
-          <a:bodyPr wrap="square" lIns="0" rIns="0" tIns="0" bIns="0" anchor="t">
-            <a:spAutoFit/>
-          </a:bodyPr>
-          <a:lstStyle/>
-          <a:p>
-            <a:pPr algn="l">
-              <a:lnSpc>
-                <a:spcPts val="3900"/>
-              </a:lnSpc>
-            </a:pPr>
-            <a:r>
-              <a:rPr sz="3000" b="1">
-                <a:solidFill>
-                  <a:srgbClr val="1C1C1C"/>
-                </a:solidFill>
-                <a:latin typeface="Noto Serif TC"/>
-                <a:ea typeface="Noto Serif TC"/>
-              </a:rPr>
-              <a:t>三步開始</a:t>
-            </a:r>
-          </a:p>
-        </p:txBody>
-      </p:sp>
-      <p:sp>
-        <p:nvSpPr>
-          <p:cNvPr id="8" name="TextBox 7"/>
-          <p:cNvSpPr txBox="1"/>
-          <p:nvPr/>
-        </p:nvSpPr>
-        <p:spPr>
-          <a:xfrm>
-            <a:off x="1447800" y="3149947"/>
-            <a:ext cx="2495550" cy="419100"/>
-          </a:xfrm>
-          <a:prstGeom prst="rect">
-            <a:avLst/>
-          </a:prstGeom>
-          <a:noFill/>
-        </p:spPr>
-        <p:txBody>
-          <a:bodyPr wrap="square" lIns="0" rIns="0" tIns="0" bIns="0" anchor="t">
-            <a:spAutoFit/>
-          </a:bodyPr>
-          <a:lstStyle/>
-          <a:p>
-            <a:pPr algn="l">
-              <a:lnSpc>
-                <a:spcPts val="3000"/>
-              </a:lnSpc>
-            </a:pPr>
-            <a:r>
-              <a:rPr sz="3000" b="1">
-                <a:solidFill>
-                  <a:srgbClr val="7A6547"/>
-                </a:solidFill>
-                <a:latin typeface="Noto Serif TC"/>
-                <a:ea typeface="Noto Serif TC"/>
-              </a:rPr>
-              <a:t>01</a:t>
-            </a:r>
-          </a:p>
-        </p:txBody>
-      </p:sp>
-      <p:sp>
-        <p:nvSpPr>
-          <p:cNvPr id="9" name="TextBox 8"/>
-          <p:cNvSpPr txBox="1"/>
-          <p:nvPr/>
-        </p:nvSpPr>
-        <p:spPr>
-          <a:xfrm>
-            <a:off x="1447800" y="3664297"/>
-            <a:ext cx="2495550" cy="342900"/>
-          </a:xfrm>
-          <a:prstGeom prst="rect">
-            <a:avLst/>
-          </a:prstGeom>
-          <a:noFill/>
-        </p:spPr>
-        <p:txBody>
-          <a:bodyPr wrap="square" lIns="0" rIns="0" tIns="0" bIns="0" anchor="t">
-            <a:spAutoFit/>
-          </a:bodyPr>
-          <a:lstStyle/>
-          <a:p>
-            <a:pPr algn="l">
-              <a:lnSpc>
-                <a:spcPts val="2400"/>
-              </a:lnSpc>
-            </a:pPr>
-            <a:r>
-              <a:rPr sz="1650" b="0">
-                <a:solidFill>
-                  <a:srgbClr val="1C1C1C"/>
-                </a:solidFill>
-                <a:latin typeface="Noto Sans TC"/>
-                <a:ea typeface="Noto Sans TC"/>
-              </a:rPr>
-              <a:t>預約</a:t>
-            </a:r>
-          </a:p>
-        </p:txBody>
-      </p:sp>
-      <p:sp>
-        <p:nvSpPr>
-          <p:cNvPr id="10" name="TextBox 9"/>
-          <p:cNvSpPr txBox="1"/>
-          <p:nvPr/>
-        </p:nvSpPr>
-        <p:spPr>
-          <a:xfrm>
-            <a:off x="1447800" y="4026247"/>
-            <a:ext cx="2495550" cy="415230"/>
-          </a:xfrm>
-          <a:prstGeom prst="rect">
-            <a:avLst/>
-          </a:prstGeom>
-          <a:noFill/>
-        </p:spPr>
-        <p:txBody>
-          <a:bodyPr wrap="square" lIns="0" rIns="0" tIns="0" bIns="0" anchor="t">
-            <a:spAutoFit/>
-          </a:bodyPr>
-          <a:lstStyle/>
-          <a:p>
-            <a:pPr algn="l">
-              <a:lnSpc>
-                <a:spcPts val="2970"/>
-              </a:lnSpc>
-            </a:pPr>
-            <a:r>
-              <a:rPr sz="1650" b="0">
-                <a:solidFill>
-                  <a:srgbClr val="1C1C1C"/>
-                </a:solidFill>
-                <a:latin typeface="Noto Sans TC"/>
-                <a:ea typeface="Noto Sans TC"/>
-              </a:rPr>
-              <a:t>看件要預約。</a:t>
-            </a:r>
-          </a:p>
-        </p:txBody>
-      </p:sp>
-      <p:sp>
-        <p:nvSpPr>
-          <p:cNvPr id="11" name="TextBox 10"/>
-          <p:cNvSpPr txBox="1"/>
-          <p:nvPr/>
-        </p:nvSpPr>
-        <p:spPr>
-          <a:xfrm>
-            <a:off x="4876800" y="3149947"/>
-            <a:ext cx="2495550" cy="419100"/>
-          </a:xfrm>
-          <a:prstGeom prst="rect">
-            <a:avLst/>
-          </a:prstGeom>
-          <a:noFill/>
-        </p:spPr>
-        <p:txBody>
-          <a:bodyPr wrap="square" lIns="0" rIns="0" tIns="0" bIns="0" anchor="t">
-            <a:spAutoFit/>
-          </a:bodyPr>
-          <a:lstStyle/>
-          <a:p>
-            <a:pPr algn="l">
-              <a:lnSpc>
-                <a:spcPts val="3000"/>
-              </a:lnSpc>
-            </a:pPr>
-            <a:r>
-              <a:rPr sz="3000" b="1">
-                <a:solidFill>
-                  <a:srgbClr val="7A6547"/>
-                </a:solidFill>
-                <a:latin typeface="Noto Serif TC"/>
-                <a:ea typeface="Noto Serif TC"/>
-              </a:rPr>
-              <a:t>02</a:t>
-            </a:r>
-          </a:p>
-        </p:txBody>
-      </p:sp>
-      <p:sp>
-        <p:nvSpPr>
-          <p:cNvPr id="12" name="TextBox 11"/>
-          <p:cNvSpPr txBox="1"/>
-          <p:nvPr/>
-        </p:nvSpPr>
-        <p:spPr>
-          <a:xfrm>
-            <a:off x="4876800" y="3664297"/>
-            <a:ext cx="2495550" cy="342900"/>
-          </a:xfrm>
-          <a:prstGeom prst="rect">
-            <a:avLst/>
-          </a:prstGeom>
-          <a:noFill/>
-        </p:spPr>
-        <p:txBody>
-          <a:bodyPr wrap="square" lIns="0" rIns="0" tIns="0" bIns="0" anchor="t">
-            <a:spAutoFit/>
-          </a:bodyPr>
-          <a:lstStyle/>
-          <a:p>
-            <a:pPr algn="l">
-              <a:lnSpc>
-                <a:spcPts val="2400"/>
-              </a:lnSpc>
-            </a:pPr>
-            <a:r>
-              <a:rPr sz="1650" b="0">
-                <a:solidFill>
-                  <a:srgbClr val="1C1C1C"/>
-                </a:solidFill>
-                <a:latin typeface="Noto Sans TC"/>
-                <a:ea typeface="Noto Sans TC"/>
-              </a:rPr>
-              <a:t>看件</a:t>
-            </a:r>
-          </a:p>
-        </p:txBody>
-      </p:sp>
-      <p:sp>
-        <p:nvSpPr>
-          <p:cNvPr id="13" name="TextBox 12"/>
-          <p:cNvSpPr txBox="1"/>
-          <p:nvPr/>
-        </p:nvSpPr>
-        <p:spPr>
-          <a:xfrm>
-            <a:off x="4876800" y="4026247"/>
-            <a:ext cx="2495550" cy="415230"/>
-          </a:xfrm>
-          <a:prstGeom prst="rect">
-            <a:avLst/>
-          </a:prstGeom>
-          <a:noFill/>
-        </p:spPr>
-        <p:txBody>
-          <a:bodyPr wrap="square" lIns="0" rIns="0" tIns="0" bIns="0" anchor="t">
-            <a:spAutoFit/>
-          </a:bodyPr>
-          <a:lstStyle/>
-          <a:p>
-            <a:pPr algn="l">
-              <a:lnSpc>
-                <a:spcPts val="2970"/>
-              </a:lnSpc>
-            </a:pPr>
-            <a:r>
-              <a:rPr sz="1650" b="0">
-                <a:solidFill>
-                  <a:srgbClr val="1C1C1C"/>
-                </a:solidFill>
-                <a:latin typeface="Noto Sans TC"/>
-                <a:ea typeface="Noto Sans TC"/>
-              </a:rPr>
-              <a:t>一次一位。</a:t>
-            </a:r>
-          </a:p>
-        </p:txBody>
-      </p:sp>
-      <p:sp>
-        <p:nvSpPr>
-          <p:cNvPr id="14" name="TextBox 13"/>
-          <p:cNvSpPr txBox="1"/>
-          <p:nvPr/>
-        </p:nvSpPr>
-        <p:spPr>
-          <a:xfrm>
-            <a:off x="8305800" y="3149947"/>
-            <a:ext cx="2495550" cy="419100"/>
-          </a:xfrm>
-          <a:prstGeom prst="rect">
-            <a:avLst/>
-          </a:prstGeom>
-          <a:noFill/>
-        </p:spPr>
-        <p:txBody>
-          <a:bodyPr wrap="square" lIns="0" rIns="0" tIns="0" bIns="0" anchor="t">
-            <a:spAutoFit/>
-          </a:bodyPr>
-          <a:lstStyle/>
-          <a:p>
-            <a:pPr algn="l">
-              <a:lnSpc>
-                <a:spcPts val="3000"/>
-              </a:lnSpc>
-            </a:pPr>
-            <a:r>
-              <a:rPr sz="3000" b="1">
-                <a:solidFill>
-                  <a:srgbClr val="7A6547"/>
-                </a:solidFill>
-                <a:latin typeface="Noto Serif TC"/>
-                <a:ea typeface="Noto Serif TC"/>
-              </a:rPr>
-              <a:t>03</a:t>
-            </a:r>
-          </a:p>
-        </p:txBody>
-      </p:sp>
-      <p:sp>
-        <p:nvSpPr>
-          <p:cNvPr id="15" name="TextBox 14"/>
-          <p:cNvSpPr txBox="1"/>
-          <p:nvPr/>
-        </p:nvSpPr>
-        <p:spPr>
-          <a:xfrm>
-            <a:off x="8305800" y="3664297"/>
-            <a:ext cx="2495550" cy="342900"/>
-          </a:xfrm>
-          <a:prstGeom prst="rect">
-            <a:avLst/>
-          </a:prstGeom>
-          <a:noFill/>
-        </p:spPr>
-        <p:txBody>
-          <a:bodyPr wrap="square" lIns="0" rIns="0" tIns="0" bIns="0" anchor="t">
-            <a:spAutoFit/>
-          </a:bodyPr>
-          <a:lstStyle/>
-          <a:p>
-            <a:pPr algn="l">
-              <a:lnSpc>
-                <a:spcPts val="2400"/>
-              </a:lnSpc>
-            </a:pPr>
-            <a:r>
-              <a:rPr sz="1650" b="0">
-                <a:solidFill>
-                  <a:srgbClr val="1C1C1C"/>
-                </a:solidFill>
-                <a:latin typeface="Noto Sans TC"/>
-                <a:ea typeface="Noto Sans TC"/>
-              </a:rPr>
-              <a:t>取件</a:t>
-            </a:r>
-          </a:p>
-        </p:txBody>
-      </p:sp>
-      <p:sp>
-        <p:nvSpPr>
-          <p:cNvPr id="16" name="TextBox 15"/>
-          <p:cNvSpPr txBox="1"/>
-          <p:nvPr/>
-        </p:nvSpPr>
-        <p:spPr>
-          <a:xfrm>
-            <a:off x="8305800" y="4026247"/>
-            <a:ext cx="2495550" cy="415230"/>
-          </a:xfrm>
-          <a:prstGeom prst="rect">
-            <a:avLst/>
-          </a:prstGeom>
-          <a:noFill/>
-        </p:spPr>
-        <p:txBody>
-          <a:bodyPr wrap="square" lIns="0" rIns="0" tIns="0" bIns="0" anchor="t">
-            <a:spAutoFit/>
-          </a:bodyPr>
-          <a:lstStyle/>
-          <a:p>
-            <a:pPr algn="l">
-              <a:lnSpc>
-                <a:spcPts val="2970"/>
-              </a:lnSpc>
-            </a:pPr>
-            <a:r>
-              <a:rPr sz="1650" b="0">
-                <a:solidFill>
-                  <a:srgbClr val="1C1C1C"/>
-                </a:solidFill>
-                <a:latin typeface="Noto Sans TC"/>
-                <a:ea typeface="Noto Sans TC"/>
-              </a:rPr>
-              <a:t>做好通知你。</a:t>
-            </a:r>
-          </a:p>
-        </p:txBody>
-      </p:sp>
-      <p:sp>
-        <p:nvSpPr>
-          <p:cNvPr id="17" name="TextBox 16"/>
-          <p:cNvSpPr txBox="1"/>
-          <p:nvPr/>
-        </p:nvSpPr>
-        <p:spPr>
-          <a:xfrm>
-            <a:off x="10906273" y="6362700"/>
-            <a:ext cx="199876" cy="228600"/>
-          </a:xfrm>
-          <a:prstGeom prst="rect">
-            <a:avLst/>
-          </a:prstGeom>
-          <a:noFill/>
-        </p:spPr>
-        <p:txBody>
-          <a:bodyPr wrap="square" lIns="0" rIns="0" tIns="0" bIns="0" anchor="t">
-            <a:spAutoFit/>
-          </a:bodyPr>
-          <a:lstStyle/>
-          <a:p>
-            <a:pPr algn="l">
-              <a:lnSpc>
                 <a:spcPts val="1500"/>
               </a:lnSpc>
             </a:pPr>
             <a:r>
               <a:rPr sz="1050" b="0">
                 <a:solidFill>
-                  <a:srgbClr val="1C1C1C"/>
+                  <a:srgbClr val="F3F1EC"/>
                 </a:solidFill>
                 <a:latin typeface="Noto Sans TC"/>
                 <a:ea typeface="Noto Sans TC"/>
@@ -7859,7 +7822,133 @@
       </p:pic>
       <p:sp>
         <p:nvSpPr>
-          <p:cNvPr id="3" name="TextBox 2"/>
+          <p:cNvPr id="3" name="Rectangle 2"/>
+          <p:cNvSpPr/>
+          <p:nvPr/>
+        </p:nvSpPr>
+        <p:spPr>
+          <a:xfrm>
+            <a:off x="1143000" y="2911822"/>
+            <a:ext cx="3048000" cy="1758255"/>
+          </a:xfrm>
+          <a:prstGeom prst="rect">
+            <a:avLst/>
+          </a:prstGeom>
+          <a:noFill/>
+          <a:ln w="9525">
+            <a:solidFill>
+              <a:srgbClr val="7A6547"/>
+            </a:solidFill>
+          </a:ln>
+          <a:effectLst/>
+        </p:spPr>
+        <p:style>
+          <a:lnRef idx="1">
+            <a:schemeClr val="accent1"/>
+          </a:lnRef>
+          <a:fillRef idx="3">
+            <a:schemeClr val="accent1"/>
+          </a:fillRef>
+          <a:effectRef idx="2">
+            <a:schemeClr val="accent1"/>
+          </a:effectRef>
+          <a:fontRef idx="minor">
+            <a:schemeClr val="lt1"/>
+          </a:fontRef>
+        </p:style>
+        <p:txBody>
+          <a:bodyPr rtlCol="0" anchor="ctr"/>
+          <a:lstStyle/>
+          <a:p/>
+        </p:txBody>
+      </p:sp>
+      <p:sp>
+        <p:nvSpPr>
+          <p:cNvPr id="4" name="Rectangle 3"/>
+          <p:cNvSpPr/>
+          <p:nvPr/>
+        </p:nvSpPr>
+        <p:spPr>
+          <a:xfrm>
+            <a:off x="4572000" y="2911822"/>
+            <a:ext cx="3048000" cy="1758255"/>
+          </a:xfrm>
+          <a:prstGeom prst="rect">
+            <a:avLst/>
+          </a:prstGeom>
+          <a:noFill/>
+          <a:ln w="9525">
+            <a:solidFill>
+              <a:srgbClr val="7A6547"/>
+            </a:solidFill>
+          </a:ln>
+          <a:effectLst/>
+        </p:spPr>
+        <p:style>
+          <a:lnRef idx="1">
+            <a:schemeClr val="accent1"/>
+          </a:lnRef>
+          <a:fillRef idx="3">
+            <a:schemeClr val="accent1"/>
+          </a:fillRef>
+          <a:effectRef idx="2">
+            <a:schemeClr val="accent1"/>
+          </a:effectRef>
+          <a:fontRef idx="minor">
+            <a:schemeClr val="lt1"/>
+          </a:fontRef>
+        </p:style>
+        <p:txBody>
+          <a:bodyPr rtlCol="0" anchor="ctr"/>
+          <a:lstStyle/>
+          <a:p/>
+        </p:txBody>
+      </p:sp>
+      <p:sp>
+        <p:nvSpPr>
+          <p:cNvPr id="5" name="Rectangle 4"/>
+          <p:cNvSpPr/>
+          <p:nvPr/>
+        </p:nvSpPr>
+        <p:spPr>
+          <a:xfrm>
+            <a:off x="8001000" y="2911822"/>
+            <a:ext cx="3048000" cy="1758255"/>
+          </a:xfrm>
+          <a:prstGeom prst="rect">
+            <a:avLst/>
+          </a:prstGeom>
+          <a:noFill/>
+          <a:ln w="9525">
+            <a:solidFill>
+              <a:srgbClr val="7A6547"/>
+            </a:solidFill>
+          </a:ln>
+          <a:effectLst/>
+        </p:spPr>
+        <p:style>
+          <a:lnRef idx="1">
+            <a:schemeClr val="accent1"/>
+          </a:lnRef>
+          <a:fillRef idx="3">
+            <a:schemeClr val="accent1"/>
+          </a:fillRef>
+          <a:effectRef idx="2">
+            <a:schemeClr val="accent1"/>
+          </a:effectRef>
+          <a:fontRef idx="minor">
+            <a:schemeClr val="lt1"/>
+          </a:fontRef>
+        </p:style>
+        <p:txBody>
+          <a:bodyPr rtlCol="0" anchor="ctr"/>
+          <a:lstStyle/>
+          <a:p/>
+        </p:txBody>
+      </p:sp>
+      <p:sp>
+        <p:nvSpPr>
+          <p:cNvPr id="6" name="TextBox 5"/>
           <p:cNvSpPr txBox="1"/>
           <p:nvPr/>
         </p:nvSpPr>
@@ -7899,13 +7988,13 @@
       </p:sp>
       <p:sp>
         <p:nvSpPr>
-          <p:cNvPr id="4" name="TextBox 3"/>
+          <p:cNvPr id="7" name="TextBox 6"/>
           <p:cNvSpPr txBox="1"/>
           <p:nvPr/>
         </p:nvSpPr>
         <p:spPr>
           <a:xfrm>
-            <a:off x="1143000" y="2840384"/>
+            <a:off x="1143000" y="1143000"/>
             <a:ext cx="9963150" cy="533400"/>
           </a:xfrm>
           <a:prstGeom prst="rect">
@@ -7932,21 +8021,21 @@
                 <a:latin typeface="Noto Serif TC"/>
                 <a:ea typeface="Noto Serif TC"/>
               </a:rPr>
-              <a:t>留久一點。</a:t>
-            </a:r>
-          </a:p>
-        </p:txBody>
-      </p:sp>
-      <p:sp>
-        <p:nvSpPr>
-          <p:cNvPr id="5" name="TextBox 4"/>
+              <a:t>三步開始</a:t>
+            </a:r>
+          </a:p>
+        </p:txBody>
+      </p:sp>
+      <p:sp>
+        <p:nvSpPr>
+          <p:cNvPr id="8" name="TextBox 7"/>
           <p:cNvSpPr txBox="1"/>
           <p:nvPr/>
         </p:nvSpPr>
         <p:spPr>
           <a:xfrm>
-            <a:off x="1143000" y="3640484"/>
-            <a:ext cx="9963150" cy="415230"/>
+            <a:off x="1447800" y="3149947"/>
+            <a:ext cx="2495550" cy="419100"/>
           </a:xfrm>
           <a:prstGeom prst="rect">
             <a:avLst/>
@@ -7961,7 +8050,47 @@
           <a:p>
             <a:pPr algn="l">
               <a:lnSpc>
-                <a:spcPts val="2970"/>
+                <a:spcPts val="3000"/>
+              </a:lnSpc>
+            </a:pPr>
+            <a:r>
+              <a:rPr sz="3000" b="1">
+                <a:solidFill>
+                  <a:srgbClr val="7A6547"/>
+                </a:solidFill>
+                <a:latin typeface="Noto Serif TC"/>
+                <a:ea typeface="Noto Serif TC"/>
+              </a:rPr>
+              <a:t>01</a:t>
+            </a:r>
+          </a:p>
+        </p:txBody>
+      </p:sp>
+      <p:sp>
+        <p:nvSpPr>
+          <p:cNvPr id="9" name="TextBox 8"/>
+          <p:cNvSpPr txBox="1"/>
+          <p:nvPr/>
+        </p:nvSpPr>
+        <p:spPr>
+          <a:xfrm>
+            <a:off x="1447800" y="3664297"/>
+            <a:ext cx="2495550" cy="342900"/>
+          </a:xfrm>
+          <a:prstGeom prst="rect">
+            <a:avLst/>
+          </a:prstGeom>
+          <a:noFill/>
+        </p:spPr>
+        <p:txBody>
+          <a:bodyPr wrap="square" lIns="0" rIns="0" tIns="0" bIns="0" anchor="t">
+            <a:spAutoFit/>
+          </a:bodyPr>
+          <a:lstStyle/>
+          <a:p>
+            <a:pPr algn="l">
+              <a:lnSpc>
+                <a:spcPts val="2400"/>
               </a:lnSpc>
             </a:pPr>
             <a:r>
@@ -7972,14 +8101,294 @@
                 <a:latin typeface="Noto Sans TC"/>
                 <a:ea typeface="Noto Sans TC"/>
               </a:rPr>
-              <a:t>still@example.com（示意，換成你的）</a:t>
-            </a:r>
-          </a:p>
-        </p:txBody>
-      </p:sp>
-      <p:sp>
-        <p:nvSpPr>
-          <p:cNvPr id="6" name="TextBox 5"/>
+              <a:t>預約</a:t>
+            </a:r>
+          </a:p>
+        </p:txBody>
+      </p:sp>
+      <p:sp>
+        <p:nvSpPr>
+          <p:cNvPr id="10" name="TextBox 9"/>
+          <p:cNvSpPr txBox="1"/>
+          <p:nvPr/>
+        </p:nvSpPr>
+        <p:spPr>
+          <a:xfrm>
+            <a:off x="1447800" y="4026247"/>
+            <a:ext cx="2495550" cy="415230"/>
+          </a:xfrm>
+          <a:prstGeom prst="rect">
+            <a:avLst/>
+          </a:prstGeom>
+          <a:noFill/>
+        </p:spPr>
+        <p:txBody>
+          <a:bodyPr wrap="square" lIns="0" rIns="0" tIns="0" bIns="0" anchor="t">
+            <a:spAutoFit/>
+          </a:bodyPr>
+          <a:lstStyle/>
+          <a:p>
+            <a:pPr algn="l">
+              <a:lnSpc>
+                <a:spcPts val="2970"/>
+              </a:lnSpc>
+            </a:pPr>
+            <a:r>
+              <a:rPr sz="1650" b="0">
+                <a:solidFill>
+                  <a:srgbClr val="1C1C1C"/>
+                </a:solidFill>
+                <a:latin typeface="Noto Sans TC"/>
+                <a:ea typeface="Noto Sans TC"/>
+              </a:rPr>
+              <a:t>看件要預約。</a:t>
+            </a:r>
+          </a:p>
+        </p:txBody>
+      </p:sp>
+      <p:sp>
+        <p:nvSpPr>
+          <p:cNvPr id="11" name="TextBox 10"/>
+          <p:cNvSpPr txBox="1"/>
+          <p:nvPr/>
+        </p:nvSpPr>
+        <p:spPr>
+          <a:xfrm>
+            <a:off x="4876800" y="3149947"/>
+            <a:ext cx="2495550" cy="419100"/>
+          </a:xfrm>
+          <a:prstGeom prst="rect">
+            <a:avLst/>
+          </a:prstGeom>
+          <a:noFill/>
+        </p:spPr>
+        <p:txBody>
+          <a:bodyPr wrap="square" lIns="0" rIns="0" tIns="0" bIns="0" anchor="t">
+            <a:spAutoFit/>
+          </a:bodyPr>
+          <a:lstStyle/>
+          <a:p>
+            <a:pPr algn="l">
+              <a:lnSpc>
+                <a:spcPts val="3000"/>
+              </a:lnSpc>
+            </a:pPr>
+            <a:r>
+              <a:rPr sz="3000" b="1">
+                <a:solidFill>
+                  <a:srgbClr val="7A6547"/>
+                </a:solidFill>
+                <a:latin typeface="Noto Serif TC"/>
+                <a:ea typeface="Noto Serif TC"/>
+              </a:rPr>
+              <a:t>02</a:t>
+            </a:r>
+          </a:p>
+        </p:txBody>
+      </p:sp>
+      <p:sp>
+        <p:nvSpPr>
+          <p:cNvPr id="12" name="TextBox 11"/>
+          <p:cNvSpPr txBox="1"/>
+          <p:nvPr/>
+        </p:nvSpPr>
+        <p:spPr>
+          <a:xfrm>
+            <a:off x="4876800" y="3664297"/>
+            <a:ext cx="2495550" cy="342900"/>
+          </a:xfrm>
+          <a:prstGeom prst="rect">
+            <a:avLst/>
+          </a:prstGeom>
+          <a:noFill/>
+        </p:spPr>
+        <p:txBody>
+          <a:bodyPr wrap="square" lIns="0" rIns="0" tIns="0" bIns="0" anchor="t">
+            <a:spAutoFit/>
+          </a:bodyPr>
+          <a:lstStyle/>
+          <a:p>
+            <a:pPr algn="l">
+              <a:lnSpc>
+                <a:spcPts val="2400"/>
+              </a:lnSpc>
+            </a:pPr>
+            <a:r>
+              <a:rPr sz="1650" b="0">
+                <a:solidFill>
+                  <a:srgbClr val="1C1C1C"/>
+                </a:solidFill>
+                <a:latin typeface="Noto Sans TC"/>
+                <a:ea typeface="Noto Sans TC"/>
+              </a:rPr>
+              <a:t>看件</a:t>
+            </a:r>
+          </a:p>
+        </p:txBody>
+      </p:sp>
+      <p:sp>
+        <p:nvSpPr>
+          <p:cNvPr id="13" name="TextBox 12"/>
+          <p:cNvSpPr txBox="1"/>
+          <p:nvPr/>
+        </p:nvSpPr>
+        <p:spPr>
+          <a:xfrm>
+            <a:off x="4876800" y="4026247"/>
+            <a:ext cx="2495550" cy="415230"/>
+          </a:xfrm>
+          <a:prstGeom prst="rect">
+            <a:avLst/>
+          </a:prstGeom>
+          <a:noFill/>
+        </p:spPr>
+        <p:txBody>
+          <a:bodyPr wrap="square" lIns="0" rIns="0" tIns="0" bIns="0" anchor="t">
+            <a:spAutoFit/>
+          </a:bodyPr>
+          <a:lstStyle/>
+          <a:p>
+            <a:pPr algn="l">
+              <a:lnSpc>
+                <a:spcPts val="2970"/>
+              </a:lnSpc>
+            </a:pPr>
+            <a:r>
+              <a:rPr sz="1650" b="0">
+                <a:solidFill>
+                  <a:srgbClr val="1C1C1C"/>
+                </a:solidFill>
+                <a:latin typeface="Noto Sans TC"/>
+                <a:ea typeface="Noto Sans TC"/>
+              </a:rPr>
+              <a:t>一次一位。</a:t>
+            </a:r>
+          </a:p>
+        </p:txBody>
+      </p:sp>
+      <p:sp>
+        <p:nvSpPr>
+          <p:cNvPr id="14" name="TextBox 13"/>
+          <p:cNvSpPr txBox="1"/>
+          <p:nvPr/>
+        </p:nvSpPr>
+        <p:spPr>
+          <a:xfrm>
+            <a:off x="8305800" y="3149947"/>
+            <a:ext cx="2495550" cy="419100"/>
+          </a:xfrm>
+          <a:prstGeom prst="rect">
+            <a:avLst/>
+          </a:prstGeom>
+          <a:noFill/>
+        </p:spPr>
+        <p:txBody>
+          <a:bodyPr wrap="square" lIns="0" rIns="0" tIns="0" bIns="0" anchor="t">
+            <a:spAutoFit/>
+          </a:bodyPr>
+          <a:lstStyle/>
+          <a:p>
+            <a:pPr algn="l">
+              <a:lnSpc>
+                <a:spcPts val="3000"/>
+              </a:lnSpc>
+            </a:pPr>
+            <a:r>
+              <a:rPr sz="3000" b="1">
+                <a:solidFill>
+                  <a:srgbClr val="7A6547"/>
+                </a:solidFill>
+                <a:latin typeface="Noto Serif TC"/>
+                <a:ea typeface="Noto Serif TC"/>
+              </a:rPr>
+              <a:t>03</a:t>
+            </a:r>
+          </a:p>
+        </p:txBody>
+      </p:sp>
+      <p:sp>
+        <p:nvSpPr>
+          <p:cNvPr id="15" name="TextBox 14"/>
+          <p:cNvSpPr txBox="1"/>
+          <p:nvPr/>
+        </p:nvSpPr>
+        <p:spPr>
+          <a:xfrm>
+            <a:off x="8305800" y="3664297"/>
+            <a:ext cx="2495550" cy="342900"/>
+          </a:xfrm>
+          <a:prstGeom prst="rect">
+            <a:avLst/>
+          </a:prstGeom>
+          <a:noFill/>
+        </p:spPr>
+        <p:txBody>
+          <a:bodyPr wrap="square" lIns="0" rIns="0" tIns="0" bIns="0" anchor="t">
+            <a:spAutoFit/>
+          </a:bodyPr>
+          <a:lstStyle/>
+          <a:p>
+            <a:pPr algn="l">
+              <a:lnSpc>
+                <a:spcPts val="2400"/>
+              </a:lnSpc>
+            </a:pPr>
+            <a:r>
+              <a:rPr sz="1650" b="0">
+                <a:solidFill>
+                  <a:srgbClr val="1C1C1C"/>
+                </a:solidFill>
+                <a:latin typeface="Noto Sans TC"/>
+                <a:ea typeface="Noto Sans TC"/>
+              </a:rPr>
+              <a:t>取件</a:t>
+            </a:r>
+          </a:p>
+        </p:txBody>
+      </p:sp>
+      <p:sp>
+        <p:nvSpPr>
+          <p:cNvPr id="16" name="TextBox 15"/>
+          <p:cNvSpPr txBox="1"/>
+          <p:nvPr/>
+        </p:nvSpPr>
+        <p:spPr>
+          <a:xfrm>
+            <a:off x="8305800" y="4026247"/>
+            <a:ext cx="2495550" cy="415230"/>
+          </a:xfrm>
+          <a:prstGeom prst="rect">
+            <a:avLst/>
+          </a:prstGeom>
+          <a:noFill/>
+        </p:spPr>
+        <p:txBody>
+          <a:bodyPr wrap="square" lIns="0" rIns="0" tIns="0" bIns="0" anchor="t">
+            <a:spAutoFit/>
+          </a:bodyPr>
+          <a:lstStyle/>
+          <a:p>
+            <a:pPr algn="l">
+              <a:lnSpc>
+                <a:spcPts val="2970"/>
+              </a:lnSpc>
+            </a:pPr>
+            <a:r>
+              <a:rPr sz="1650" b="0">
+                <a:solidFill>
+                  <a:srgbClr val="1C1C1C"/>
+                </a:solidFill>
+                <a:latin typeface="Noto Sans TC"/>
+                <a:ea typeface="Noto Sans TC"/>
+              </a:rPr>
+              <a:t>做好通知你。</a:t>
+            </a:r>
+          </a:p>
+        </p:txBody>
+      </p:sp>
+      <p:sp>
+        <p:nvSpPr>
+          <p:cNvPr id="17" name="TextBox 16"/>
           <p:cNvSpPr txBox="1"/>
           <p:nvPr/>
         </p:nvSpPr>
